--- a/apresentacao/apresentacao_slides.pptx
+++ b/apresentacao/apresentacao_slides.pptx
@@ -8898,6 +8898,10 @@
           </a:solidFill>
           <a:ln/>
         </p:spPr>
+        <p:txBody>
+          <a:bodyPr/>
+          <a:p/>
+        </p:txBody>
       </p:sp>
       <p:sp>
         <p:nvSpPr>
@@ -8918,6 +8922,10 @@
           </a:solidFill>
           <a:ln/>
         </p:spPr>
+        <p:txBody>
+          <a:bodyPr/>
+          <a:p/>
+        </p:txBody>
       </p:sp>
       <p:sp>
         <p:nvSpPr>
@@ -8994,7 +9002,7 @@
                 <a:ea typeface="Cambria" pitchFamily="34" charset="-122"/>
                 <a:cs typeface="Cambria" pitchFamily="34" charset="-120"/>
               </a:rPr>
-              <a:t>Gestor Regional Nordeste</a:t>
+              <a:t>Gestor Regional (por Região)</a:t>
             </a:r>
             <a:endParaRPr lang="en-US" sz="1500" dirty="0"/>
           </a:p>
@@ -9021,6 +9029,10 @@
           </a:solidFill>
           <a:ln/>
         </p:spPr>
+        <p:txBody>
+          <a:bodyPr/>
+          <a:p/>
+        </p:txBody>
       </p:sp>
       <p:sp>
         <p:nvSpPr>
@@ -9055,7 +9067,7 @@
                 <a:ea typeface="Courier New" pitchFamily="34" charset="-122"/>
                 <a:cs typeface="Courier New" pitchFamily="34" charset="-120"/>
               </a:rPr>
-              <a:t>[Regiao] = "Nordeste"</a:t>
+              <a:t>[Regiao] = "Nordeste" / "Norte" / "Sul" / "Sudeste" / "Centro-Oeste"</a:t>
             </a:r>
             <a:endParaRPr lang="en-US" sz="1150" dirty="0"/>
           </a:p>
@@ -9097,7 +9109,7 @@
                 <a:ea typeface="Calibri" pitchFamily="34" charset="-122"/>
                 <a:cs typeface="Calibri" pitchFamily="34" charset="-120"/>
               </a:rPr>
-              <a:t>Acesso restrito apenas aos municípios da região Nordeste.</a:t>
+              <a:t>Foram criados 5 roles, um para cada região, restringindo o acesso apenas aos municípios da respectiva região.</a:t>
             </a:r>
             <a:endParaRPr lang="en-US" sz="1200" dirty="0"/>
           </a:p>
@@ -9124,6 +9136,10 @@
           </a:solidFill>
           <a:ln/>
         </p:spPr>
+        <p:txBody>
+          <a:bodyPr/>
+          <a:p/>
+        </p:txBody>
       </p:sp>
       <p:sp>
         <p:nvSpPr>
@@ -9144,6 +9160,10 @@
           </a:solidFill>
           <a:ln/>
         </p:spPr>
+        <p:txBody>
+          <a:bodyPr/>
+          <a:p/>
+        </p:txBody>
       </p:sp>
       <p:sp>
         <p:nvSpPr>
@@ -9247,6 +9267,10 @@
           </a:solidFill>
           <a:ln/>
         </p:spPr>
+        <p:txBody>
+          <a:bodyPr/>
+          <a:p/>
+        </p:txBody>
       </p:sp>
       <p:sp>
         <p:nvSpPr>
@@ -9350,6 +9374,10 @@
           </a:solidFill>
           <a:ln/>
         </p:spPr>
+        <p:txBody>
+          <a:bodyPr/>
+          <a:p/>
+        </p:txBody>
       </p:sp>
       <p:sp>
         <p:nvSpPr>
@@ -9370,6 +9398,10 @@
           </a:solidFill>
           <a:ln/>
         </p:spPr>
+        <p:txBody>
+          <a:bodyPr/>
+          <a:p/>
+        </p:txBody>
       </p:sp>
       <p:sp>
         <p:nvSpPr>
@@ -9473,6 +9505,10 @@
           </a:solidFill>
           <a:ln/>
         </p:spPr>
+        <p:txBody>
+          <a:bodyPr/>
+          <a:p/>
+        </p:txBody>
       </p:sp>
       <p:sp>
         <p:nvSpPr>
